--- a/chapter13/parts/part-03-documentation-and-metadata/clip.pptx
+++ b/chapter13/parts/part-03-documentation-and-metadata/clip.pptx
@@ -4184,10 +4184,12 @@
           </a:bodyPr>
           <a:lstStyle/>
           <a:p>
-            <a:pPr>
+            <a:pPr lvl="0" marL="457200" indent="-228600">
+              <a:buFont typeface="Calibri"/>
               <a:spcAft>
                 <a:spcPts val="1000"/>
               </a:spcAft>
+              <a:buSzPct val="100000"/>
               <a:buChar char="•"/>
               <a:lnSpc>
                 <a:spcPts val="2200"/>
@@ -4323,10 +4325,12 @@
           </a:bodyPr>
           <a:lstStyle/>
           <a:p>
-            <a:pPr>
+            <a:pPr lvl="0" marL="457200" indent="-228600">
+              <a:buFont typeface="Calibri"/>
               <a:spcAft>
                 <a:spcPts val="1000"/>
               </a:spcAft>
+              <a:buSzPct val="100000"/>
               <a:buChar char="•"/>
               <a:lnSpc>
                 <a:spcPts val="2200"/>
@@ -4343,10 +4347,12 @@
             </a:r>
           </a:p>
           <a:p>
-            <a:pPr>
+            <a:pPr lvl="0" marL="457200" indent="-228600">
+              <a:buFont typeface="Calibri"/>
               <a:spcAft>
                 <a:spcPts val="1000"/>
               </a:spcAft>
+              <a:buSzPct val="100000"/>
               <a:buChar char="•"/>
               <a:lnSpc>
                 <a:spcPts val="2200"/>
@@ -4482,10 +4488,12 @@
           </a:bodyPr>
           <a:lstStyle/>
           <a:p>
-            <a:pPr>
+            <a:pPr lvl="0" marL="457200" indent="-228600">
+              <a:buFont typeface="Calibri"/>
               <a:spcAft>
                 <a:spcPts val="1000"/>
               </a:spcAft>
+              <a:buSzPct val="100000"/>
               <a:buChar char="•"/>
               <a:lnSpc>
                 <a:spcPts val="2200"/>
@@ -4502,10 +4510,12 @@
             </a:r>
           </a:p>
           <a:p>
-            <a:pPr>
+            <a:pPr lvl="0" marL="457200" indent="-228600">
+              <a:buFont typeface="Calibri"/>
               <a:spcAft>
                 <a:spcPts val="1000"/>
               </a:spcAft>
+              <a:buSzPct val="100000"/>
               <a:buChar char="•"/>
               <a:lnSpc>
                 <a:spcPts val="2200"/>
@@ -4522,10 +4532,12 @@
             </a:r>
           </a:p>
           <a:p>
-            <a:pPr>
+            <a:pPr lvl="0" marL="457200" indent="-228600">
+              <a:buFont typeface="Calibri"/>
               <a:spcAft>
                 <a:spcPts val="1000"/>
               </a:spcAft>
+              <a:buSzPct val="100000"/>
               <a:buChar char="•"/>
               <a:lnSpc>
                 <a:spcPts val="2200"/>
@@ -4542,10 +4554,12 @@
             </a:r>
           </a:p>
           <a:p>
-            <a:pPr>
+            <a:pPr lvl="0" marL="457200" indent="-228600">
+              <a:buFont typeface="Calibri"/>
               <a:spcAft>
                 <a:spcPts val="1000"/>
               </a:spcAft>
+              <a:buSzPct val="100000"/>
               <a:buChar char="•"/>
               <a:lnSpc>
                 <a:spcPts val="2200"/>
@@ -4562,10 +4576,12 @@
             </a:r>
           </a:p>
           <a:p>
-            <a:pPr>
+            <a:pPr lvl="0" marL="457200" indent="-228600">
+              <a:buFont typeface="Calibri"/>
               <a:spcAft>
                 <a:spcPts val="1000"/>
               </a:spcAft>
+              <a:buSzPct val="100000"/>
               <a:buChar char="•"/>
               <a:lnSpc>
                 <a:spcPts val="2200"/>
@@ -4582,10 +4598,12 @@
             </a:r>
           </a:p>
           <a:p>
-            <a:pPr>
+            <a:pPr lvl="0" marL="457200" indent="-228600">
+              <a:buFont typeface="Calibri"/>
               <a:spcAft>
                 <a:spcPts val="1000"/>
               </a:spcAft>
+              <a:buSzPct val="100000"/>
               <a:buChar char="•"/>
               <a:lnSpc>
                 <a:spcPts val="2200"/>
@@ -4721,10 +4739,12 @@
           </a:bodyPr>
           <a:lstStyle/>
           <a:p>
-            <a:pPr>
+            <a:pPr lvl="0" marL="457200" indent="-228600">
+              <a:buFont typeface="Calibri"/>
               <a:spcAft>
                 <a:spcPts val="1000"/>
               </a:spcAft>
+              <a:buSzPct val="100000"/>
               <a:buChar char="•"/>
               <a:lnSpc>
                 <a:spcPts val="2200"/>
@@ -4741,10 +4761,12 @@
             </a:r>
           </a:p>
           <a:p>
-            <a:pPr>
+            <a:pPr lvl="0" marL="457200" indent="-228600">
+              <a:buFont typeface="Calibri"/>
               <a:spcAft>
                 <a:spcPts val="1000"/>
               </a:spcAft>
+              <a:buSzPct val="100000"/>
               <a:buChar char="•"/>
               <a:lnSpc>
                 <a:spcPts val="2200"/>
@@ -4761,10 +4783,12 @@
             </a:r>
           </a:p>
           <a:p>
-            <a:pPr>
+            <a:pPr lvl="0" marL="457200" indent="-228600">
+              <a:buFont typeface="Calibri"/>
               <a:spcAft>
                 <a:spcPts val="1000"/>
               </a:spcAft>
+              <a:buSzPct val="100000"/>
               <a:buChar char="•"/>
               <a:lnSpc>
                 <a:spcPts val="2200"/>
@@ -4781,10 +4805,12 @@
             </a:r>
           </a:p>
           <a:p>
-            <a:pPr>
+            <a:pPr lvl="0" marL="457200" indent="-228600">
+              <a:buFont typeface="Calibri"/>
               <a:spcAft>
                 <a:spcPts val="1000"/>
               </a:spcAft>
+              <a:buSzPct val="100000"/>
               <a:buChar char="•"/>
               <a:lnSpc>
                 <a:spcPts val="2200"/>
@@ -4801,10 +4827,12 @@
             </a:r>
           </a:p>
           <a:p>
-            <a:pPr>
+            <a:pPr lvl="0" marL="457200" indent="-228600">
+              <a:buFont typeface="Calibri"/>
               <a:spcAft>
                 <a:spcPts val="1000"/>
               </a:spcAft>
+              <a:buSzPct val="100000"/>
               <a:buChar char="•"/>
               <a:lnSpc>
                 <a:spcPts val="2200"/>
@@ -4821,10 +4849,12 @@
             </a:r>
           </a:p>
           <a:p>
-            <a:pPr>
+            <a:pPr lvl="0" marL="457200" indent="-228600">
+              <a:buFont typeface="Calibri"/>
               <a:spcAft>
                 <a:spcPts val="1000"/>
               </a:spcAft>
+              <a:buSzPct val="100000"/>
               <a:buChar char="•"/>
               <a:lnSpc>
                 <a:spcPts val="2200"/>
@@ -4960,10 +4990,12 @@
           </a:bodyPr>
           <a:lstStyle/>
           <a:p>
-            <a:pPr>
+            <a:pPr lvl="0" marL="457200" indent="-228600">
+              <a:buFont typeface="Calibri"/>
               <a:spcAft>
                 <a:spcPts val="1000"/>
               </a:spcAft>
+              <a:buSzPct val="100000"/>
               <a:buChar char="•"/>
               <a:lnSpc>
                 <a:spcPts val="2200"/>
@@ -4980,10 +5012,12 @@
             </a:r>
           </a:p>
           <a:p>
-            <a:pPr>
+            <a:pPr lvl="0" marL="457200" indent="-228600">
+              <a:buFont typeface="Calibri"/>
               <a:spcAft>
                 <a:spcPts val="1000"/>
               </a:spcAft>
+              <a:buSzPct val="100000"/>
               <a:buChar char="•"/>
               <a:lnSpc>
                 <a:spcPts val="2200"/>
@@ -5000,10 +5034,12 @@
             </a:r>
           </a:p>
           <a:p>
-            <a:pPr>
+            <a:pPr lvl="0" marL="457200" indent="-228600">
+              <a:buFont typeface="Calibri"/>
               <a:spcAft>
                 <a:spcPts val="1000"/>
               </a:spcAft>
+              <a:buSzPct val="100000"/>
               <a:buChar char="•"/>
               <a:lnSpc>
                 <a:spcPts val="2200"/>
@@ -5020,10 +5056,12 @@
             </a:r>
           </a:p>
           <a:p>
-            <a:pPr>
+            <a:pPr lvl="0" marL="457200" indent="-228600">
+              <a:buFont typeface="Calibri"/>
               <a:spcAft>
                 <a:spcPts val="1000"/>
               </a:spcAft>
+              <a:buSzPct val="100000"/>
               <a:buChar char="•"/>
               <a:lnSpc>
                 <a:spcPts val="2200"/>
@@ -5040,10 +5078,12 @@
             </a:r>
           </a:p>
           <a:p>
-            <a:pPr>
+            <a:pPr lvl="0" marL="457200" indent="-228600">
+              <a:buFont typeface="Calibri"/>
               <a:spcAft>
                 <a:spcPts val="1000"/>
               </a:spcAft>
+              <a:buSzPct val="100000"/>
               <a:buChar char="•"/>
               <a:lnSpc>
                 <a:spcPts val="2200"/>
@@ -5060,10 +5100,12 @@
             </a:r>
           </a:p>
           <a:p>
-            <a:pPr>
+            <a:pPr lvl="0" marL="457200" indent="-228600">
+              <a:buFont typeface="Calibri"/>
               <a:spcAft>
                 <a:spcPts val="1000"/>
               </a:spcAft>
+              <a:buSzPct val="100000"/>
               <a:buChar char="•"/>
               <a:lnSpc>
                 <a:spcPts val="2200"/>
@@ -5199,10 +5241,12 @@
           </a:bodyPr>
           <a:lstStyle/>
           <a:p>
-            <a:pPr>
+            <a:pPr lvl="0" marL="457200" indent="-228600">
+              <a:buFont typeface="Calibri"/>
               <a:spcAft>
                 <a:spcPts val="1000"/>
               </a:spcAft>
+              <a:buSzPct val="100000"/>
               <a:buChar char="•"/>
               <a:lnSpc>
                 <a:spcPts val="2200"/>
@@ -5219,10 +5263,12 @@
             </a:r>
           </a:p>
           <a:p>
-            <a:pPr>
+            <a:pPr lvl="0" marL="457200" indent="-228600">
+              <a:buFont typeface="Calibri"/>
               <a:spcAft>
                 <a:spcPts val="1000"/>
               </a:spcAft>
+              <a:buSzPct val="100000"/>
               <a:buChar char="•"/>
               <a:lnSpc>
                 <a:spcPts val="2200"/>
@@ -5239,10 +5285,12 @@
             </a:r>
           </a:p>
           <a:p>
-            <a:pPr>
+            <a:pPr lvl="0" marL="457200" indent="-228600">
+              <a:buFont typeface="Calibri"/>
               <a:spcAft>
                 <a:spcPts val="1000"/>
               </a:spcAft>
+              <a:buSzPct val="100000"/>
               <a:buChar char="•"/>
               <a:lnSpc>
                 <a:spcPts val="2200"/>
@@ -5259,10 +5307,12 @@
             </a:r>
           </a:p>
           <a:p>
-            <a:pPr>
+            <a:pPr lvl="0" marL="457200" indent="-228600">
+              <a:buFont typeface="Calibri"/>
               <a:spcAft>
                 <a:spcPts val="1000"/>
               </a:spcAft>
+              <a:buSzPct val="100000"/>
               <a:buChar char="•"/>
               <a:lnSpc>
                 <a:spcPts val="2200"/>
@@ -5398,10 +5448,12 @@
           </a:bodyPr>
           <a:lstStyle/>
           <a:p>
-            <a:pPr>
+            <a:pPr lvl="0" marL="457200" indent="-228600">
+              <a:buFont typeface="Calibri"/>
               <a:spcAft>
                 <a:spcPts val="1000"/>
               </a:spcAft>
+              <a:buSzPct val="100000"/>
               <a:buChar char="•"/>
               <a:lnSpc>
                 <a:spcPts val="2200"/>
@@ -5418,10 +5470,12 @@
             </a:r>
           </a:p>
           <a:p>
-            <a:pPr>
+            <a:pPr lvl="0" marL="457200" indent="-228600">
+              <a:buFont typeface="Calibri"/>
               <a:spcAft>
                 <a:spcPts val="1000"/>
               </a:spcAft>
+              <a:buSzPct val="100000"/>
               <a:buChar char="•"/>
               <a:lnSpc>
                 <a:spcPts val="2200"/>
